--- a/youtube_ranking_20260613.pptx
+++ b/youtube_ranking_20260613.pptx
@@ -3258,6 +3258,30 @@
           </a:p>
         </p:txBody>
       </p:sp>
+      <p:pic>
+        <p:nvPicPr>
+          <p:cNvPr id="6" name="Picture 5" descr="ezgif_com-animated-gif-maker.gif"/>
+          <p:cNvPicPr>
+            <a:picLocks noChangeAspect="1"/>
+          </p:cNvPicPr>
+          <p:nvPr/>
+        </p:nvPicPr>
+        <p:blipFill>
+          <a:blip r:embed="rId2"/>
+          <a:stretch>
+            <a:fillRect/>
+          </a:stretch>
+        </p:blipFill>
+        <p:spPr>
+          <a:xfrm>
+            <a:off x="6035040" y="45720"/>
+            <a:ext cx="3017520" cy="5052060"/>
+          </a:xfrm>
+          <a:prstGeom prst="rect">
+            <a:avLst/>
+          </a:prstGeom>
+        </p:spPr>
+      </p:pic>
     </p:spTree>
   </p:cSld>
   <p:clrMapOvr>
@@ -3613,6 +3637,30 @@
           </a:p>
         </p:txBody>
       </p:sp>
+      <p:pic>
+        <p:nvPicPr>
+          <p:cNvPr id="12" name="Picture 11" descr="ezgif_com-animated-gif-maker.gif"/>
+          <p:cNvPicPr>
+            <a:picLocks noChangeAspect="1"/>
+          </p:cNvPicPr>
+          <p:nvPr/>
+        </p:nvPicPr>
+        <p:blipFill>
+          <a:blip r:embed="rId5"/>
+          <a:stretch>
+            <a:fillRect/>
+          </a:stretch>
+        </p:blipFill>
+        <p:spPr>
+          <a:xfrm>
+            <a:off x="6035040" y="45720"/>
+            <a:ext cx="3017520" cy="5052060"/>
+          </a:xfrm>
+          <a:prstGeom prst="rect">
+            <a:avLst/>
+          </a:prstGeom>
+        </p:spPr>
+      </p:pic>
     </p:spTree>
   </p:cSld>
   <p:clrMapOvr>
@@ -3984,6 +4032,30 @@
           </a:p>
         </p:txBody>
       </p:sp>
+      <p:pic>
+        <p:nvPicPr>
+          <p:cNvPr id="12" name="Picture 11" descr="ezgif_com-animated-gif-maker.gif"/>
+          <p:cNvPicPr>
+            <a:picLocks noChangeAspect="1"/>
+          </p:cNvPicPr>
+          <p:nvPr/>
+        </p:nvPicPr>
+        <p:blipFill>
+          <a:blip r:embed="rId5"/>
+          <a:stretch>
+            <a:fillRect/>
+          </a:stretch>
+        </p:blipFill>
+        <p:spPr>
+          <a:xfrm>
+            <a:off x="6035040" y="45720"/>
+            <a:ext cx="3017520" cy="5052060"/>
+          </a:xfrm>
+          <a:prstGeom prst="rect">
+            <a:avLst/>
+          </a:prstGeom>
+        </p:spPr>
+      </p:pic>
     </p:spTree>
   </p:cSld>
   <p:clrMapOvr>
@@ -9403,6 +9475,30 @@
           </a:p>
         </p:txBody>
       </p:sp>
+      <p:pic>
+        <p:nvPicPr>
+          <p:cNvPr id="12" name="Picture 11" descr="ezgif_com-animated-gif-maker.gif"/>
+          <p:cNvPicPr>
+            <a:picLocks noChangeAspect="1"/>
+          </p:cNvPicPr>
+          <p:nvPr/>
+        </p:nvPicPr>
+        <p:blipFill>
+          <a:blip r:embed="rId5"/>
+          <a:stretch>
+            <a:fillRect/>
+          </a:stretch>
+        </p:blipFill>
+        <p:spPr>
+          <a:xfrm>
+            <a:off x="6035040" y="45720"/>
+            <a:ext cx="3017520" cy="5052060"/>
+          </a:xfrm>
+          <a:prstGeom prst="rect">
+            <a:avLst/>
+          </a:prstGeom>
+        </p:spPr>
+      </p:pic>
     </p:spTree>
   </p:cSld>
   <p:clrMapOvr>
@@ -9758,6 +9854,30 @@
           </a:p>
         </p:txBody>
       </p:sp>
+      <p:pic>
+        <p:nvPicPr>
+          <p:cNvPr id="12" name="Picture 11" descr="ezgif_com-animated-gif-maker.gif"/>
+          <p:cNvPicPr>
+            <a:picLocks noChangeAspect="1"/>
+          </p:cNvPicPr>
+          <p:nvPr/>
+        </p:nvPicPr>
+        <p:blipFill>
+          <a:blip r:embed="rId5"/>
+          <a:stretch>
+            <a:fillRect/>
+          </a:stretch>
+        </p:blipFill>
+        <p:spPr>
+          <a:xfrm>
+            <a:off x="6035040" y="45720"/>
+            <a:ext cx="3017520" cy="5052060"/>
+          </a:xfrm>
+          <a:prstGeom prst="rect">
+            <a:avLst/>
+          </a:prstGeom>
+        </p:spPr>
+      </p:pic>
     </p:spTree>
   </p:cSld>
   <p:clrMapOvr>
@@ -10113,6 +10233,30 @@
           </a:p>
         </p:txBody>
       </p:sp>
+      <p:pic>
+        <p:nvPicPr>
+          <p:cNvPr id="12" name="Picture 11" descr="ezgif_com-animated-gif-maker.gif"/>
+          <p:cNvPicPr>
+            <a:picLocks noChangeAspect="1"/>
+          </p:cNvPicPr>
+          <p:nvPr/>
+        </p:nvPicPr>
+        <p:blipFill>
+          <a:blip r:embed="rId5"/>
+          <a:stretch>
+            <a:fillRect/>
+          </a:stretch>
+        </p:blipFill>
+        <p:spPr>
+          <a:xfrm>
+            <a:off x="6035040" y="45720"/>
+            <a:ext cx="3017520" cy="5052060"/>
+          </a:xfrm>
+          <a:prstGeom prst="rect">
+            <a:avLst/>
+          </a:prstGeom>
+        </p:spPr>
+      </p:pic>
     </p:spTree>
   </p:cSld>
   <p:clrMapOvr>
@@ -10468,6 +10612,30 @@
           </a:p>
         </p:txBody>
       </p:sp>
+      <p:pic>
+        <p:nvPicPr>
+          <p:cNvPr id="12" name="Picture 11" descr="ezgif_com-animated-gif-maker.gif"/>
+          <p:cNvPicPr>
+            <a:picLocks noChangeAspect="1"/>
+          </p:cNvPicPr>
+          <p:nvPr/>
+        </p:nvPicPr>
+        <p:blipFill>
+          <a:blip r:embed="rId5"/>
+          <a:stretch>
+            <a:fillRect/>
+          </a:stretch>
+        </p:blipFill>
+        <p:spPr>
+          <a:xfrm>
+            <a:off x="6035040" y="45720"/>
+            <a:ext cx="3017520" cy="5052060"/>
+          </a:xfrm>
+          <a:prstGeom prst="rect">
+            <a:avLst/>
+          </a:prstGeom>
+        </p:spPr>
+      </p:pic>
     </p:spTree>
   </p:cSld>
   <p:clrMapOvr>
@@ -10823,6 +10991,30 @@
           </a:p>
         </p:txBody>
       </p:sp>
+      <p:pic>
+        <p:nvPicPr>
+          <p:cNvPr id="12" name="Picture 11" descr="ezgif_com-animated-gif-maker.gif"/>
+          <p:cNvPicPr>
+            <a:picLocks noChangeAspect="1"/>
+          </p:cNvPicPr>
+          <p:nvPr/>
+        </p:nvPicPr>
+        <p:blipFill>
+          <a:blip r:embed="rId5"/>
+          <a:stretch>
+            <a:fillRect/>
+          </a:stretch>
+        </p:blipFill>
+        <p:spPr>
+          <a:xfrm>
+            <a:off x="6035040" y="45720"/>
+            <a:ext cx="3017520" cy="5052060"/>
+          </a:xfrm>
+          <a:prstGeom prst="rect">
+            <a:avLst/>
+          </a:prstGeom>
+        </p:spPr>
+      </p:pic>
     </p:spTree>
   </p:cSld>
   <p:clrMapOvr>
@@ -11178,6 +11370,30 @@
           </a:p>
         </p:txBody>
       </p:sp>
+      <p:pic>
+        <p:nvPicPr>
+          <p:cNvPr id="12" name="Picture 11" descr="ezgif_com-animated-gif-maker.gif"/>
+          <p:cNvPicPr>
+            <a:picLocks noChangeAspect="1"/>
+          </p:cNvPicPr>
+          <p:nvPr/>
+        </p:nvPicPr>
+        <p:blipFill>
+          <a:blip r:embed="rId5"/>
+          <a:stretch>
+            <a:fillRect/>
+          </a:stretch>
+        </p:blipFill>
+        <p:spPr>
+          <a:xfrm>
+            <a:off x="6035040" y="45720"/>
+            <a:ext cx="3017520" cy="5052060"/>
+          </a:xfrm>
+          <a:prstGeom prst="rect">
+            <a:avLst/>
+          </a:prstGeom>
+        </p:spPr>
+      </p:pic>
     </p:spTree>
   </p:cSld>
   <p:clrMapOvr>
@@ -11533,6 +11749,30 @@
           </a:p>
         </p:txBody>
       </p:sp>
+      <p:pic>
+        <p:nvPicPr>
+          <p:cNvPr id="12" name="Picture 11" descr="ezgif_com-animated-gif-maker.gif"/>
+          <p:cNvPicPr>
+            <a:picLocks noChangeAspect="1"/>
+          </p:cNvPicPr>
+          <p:nvPr/>
+        </p:nvPicPr>
+        <p:blipFill>
+          <a:blip r:embed="rId5"/>
+          <a:stretch>
+            <a:fillRect/>
+          </a:stretch>
+        </p:blipFill>
+        <p:spPr>
+          <a:xfrm>
+            <a:off x="6035040" y="45720"/>
+            <a:ext cx="3017520" cy="5052060"/>
+          </a:xfrm>
+          <a:prstGeom prst="rect">
+            <a:avLst/>
+          </a:prstGeom>
+        </p:spPr>
+      </p:pic>
     </p:spTree>
   </p:cSld>
   <p:clrMapOvr>
@@ -11888,6 +12128,30 @@
           </a:p>
         </p:txBody>
       </p:sp>
+      <p:pic>
+        <p:nvPicPr>
+          <p:cNvPr id="12" name="Picture 11" descr="ezgif_com-animated-gif-maker.gif"/>
+          <p:cNvPicPr>
+            <a:picLocks noChangeAspect="1"/>
+          </p:cNvPicPr>
+          <p:nvPr/>
+        </p:nvPicPr>
+        <p:blipFill>
+          <a:blip r:embed="rId5"/>
+          <a:stretch>
+            <a:fillRect/>
+          </a:stretch>
+        </p:blipFill>
+        <p:spPr>
+          <a:xfrm>
+            <a:off x="6035040" y="45720"/>
+            <a:ext cx="3017520" cy="5052060"/>
+          </a:xfrm>
+          <a:prstGeom prst="rect">
+            <a:avLst/>
+          </a:prstGeom>
+        </p:spPr>
+      </p:pic>
     </p:spTree>
   </p:cSld>
   <p:clrMapOvr>

--- a/youtube_ranking_20260613.pptx
+++ b/youtube_ranking_20260613.pptx
@@ -3456,7 +3456,7 @@
                 </a:solidFill>
                 <a:latin typeface="Arial"/>
               </a:rPr>
-              <a:t>https://www.youtube.com/watch?v=jUDBTz8hGHQ</a:t>
+              <a:t>https://www.youtube.com/watch?v=SZ6CRUa2PfA</a:t>
             </a:r>
           </a:p>
         </p:txBody>
@@ -3492,7 +3492,7 @@
                 <a:latin typeface="Arial"/>
                 <a:hlinkClick r:id="rId4"/>
               </a:rPr>
-              <a:t>『FINAL FANTASY VII REVELATION』 1stトレーラー｜タイトル発表</a:t>
+              <a:t>【#にじシャドバ杯 Day1】にじさんじシャドバ杯2026 リーグ戦</a:t>
             </a:r>
           </a:p>
         </p:txBody>
@@ -3527,7 +3527,7 @@
                 </a:solidFill>
                 <a:latin typeface="Arial"/>
               </a:rPr>
-              <a:t>📺  PlayStation Japan</a:t>
+              <a:t>📺  にじさんじ</a:t>
             </a:r>
           </a:p>
         </p:txBody>
@@ -3562,7 +3562,7 @@
                 </a:solidFill>
                 <a:latin typeface="Arial"/>
               </a:rPr>
-              <a:t>👁 149,965  👍 2,141  💬 0</a:t>
+              <a:t>👁 567,806  👍 8,031  💬 30</a:t>
             </a:r>
           </a:p>
         </p:txBody>
@@ -3597,7 +3597,7 @@
                 </a:solidFill>
                 <a:latin typeface="Arial"/>
               </a:rPr>
-              <a:t>⏱ 2:26  ·  📅 公開15時間前</a:t>
+              <a:t>⏱ 5:38:53  ·  📅 公開-6時間前</a:t>
             </a:r>
           </a:p>
         </p:txBody>
@@ -3632,7 +3632,7 @@
                 </a:solidFill>
                 <a:latin typeface="Arial"/>
               </a:rPr>
-              <a:t>💡 公開15時間で急上昇入り！　10万再生突破の話題作</a:t>
+              <a:t>💡 公開-6時間で急上昇入り！　50万再生の注目コンテンツ</a:t>
             </a:r>
           </a:p>
         </p:txBody>
@@ -3922,7 +3922,7 @@
                 <a:latin typeface="Arial"/>
                 <a:hlinkClick r:id="rId4"/>
               </a:rPr>
-              <a:t>【自己紹介曲】ぷろふぃ〜る / のんふぃく！【Dance Practice】</a:t>
+              <a:t>【歌ってみた】おしゃかしゃま/星導ショウ</a:t>
             </a:r>
           </a:p>
         </p:txBody>
@@ -3957,7 +3957,7 @@
                 </a:solidFill>
                 <a:latin typeface="Arial"/>
               </a:rPr>
-              <a:t>👁 140,895  👍 8,568  💬 395  ⏱ 3:55  📅 公開9時間前</a:t>
+              <a:t>👁 32,555  👍 28,673  💬 1,333  ⏱ 3:51  📅 公開-6時間前</a:t>
             </a:r>
           </a:p>
         </p:txBody>
@@ -3992,7 +3992,7 @@
                 </a:solidFill>
                 <a:latin typeface="Arial"/>
               </a:rPr>
-              <a:t>💡 公開9時間で急上昇入り！　10万再生突破の話題作　いいね率6.1%と視聴者の支持が非常に高い</a:t>
+              <a:t>💡 公開-6時間で急上昇入り！　急上昇中の新興コンテンツ　いいね率88.1%と視聴者の支持が非常に高い</a:t>
             </a:r>
           </a:p>
         </p:txBody>
@@ -4027,7 +4027,7 @@
                 </a:solidFill>
                 <a:latin typeface="Arial"/>
               </a:rPr>
-              <a:t>https://www.youtube.com/watch?v=K_cOrwcV-54</a:t>
+              <a:t>https://www.youtube.com/watch?v=zDLyAvDHKD8</a:t>
             </a:r>
           </a:p>
         </p:txBody>
@@ -4346,7 +4346,7 @@
                 </a:solidFill>
                 <a:latin typeface="Arial"/>
               </a:rPr>
-              <a:t>📺 やっさん2  👁 19,151,661  👍 158,016  ⏱ 0:10  📅 2025-08-09</a:t>
+              <a:t>📺 やっさん2  👁 19,151,740  👍 158,016  ⏱ 0:10  📅 2025-08-09</a:t>
             </a:r>
           </a:p>
         </p:txBody>
@@ -4580,7 +4580,7 @@
                 </a:solidFill>
                 <a:latin typeface="Arial"/>
               </a:rPr>
-              <a:t>📺 ネタ秒  👁 14,609,719  👍 41,749  ⏱ 0:17  📅 2025-09-26</a:t>
+              <a:t>📺 ネタ秒  👁 14,609,720  👍 41,749  ⏱ 0:17  📅 2025-09-26</a:t>
             </a:r>
           </a:p>
         </p:txBody>
@@ -4814,7 +4814,7 @@
                 </a:solidFill>
                 <a:latin typeface="Arial"/>
               </a:rPr>
-              <a:t>📺 ごっこ倶楽部のウラ垢 - STUDIO GOKKO -  👁 12,781,574  👍 170,512  ⏱ 1:28  📅 2025-04-14</a:t>
+              <a:t>📺 ごっこ倶楽部のウラ垢 - STUDIO GOKKO -  👁 12,781,582  👍 170,508  ⏱ 1:28  📅 2025-04-14</a:t>
             </a:r>
           </a:p>
         </p:txBody>
@@ -5048,7 +5048,7 @@
                 </a:solidFill>
                 <a:latin typeface="Arial"/>
               </a:rPr>
-              <a:t>📺 はるえもん  👁 11,724,230  👍 185,886  ⏱ 1:33  📅 2025-07-05</a:t>
+              <a:t>📺 はるえもん  👁 11,724,576  👍 185,887  ⏱ 1:33  📅 2025-07-05</a:t>
             </a:r>
           </a:p>
         </p:txBody>
@@ -5282,7 +5282,7 @@
                 </a:solidFill>
                 <a:latin typeface="Arial"/>
               </a:rPr>
-              <a:t>📺 やっさん2  👁 11,505,579  👍 132,776  ⏱ 0:18  📅 2025-11-01</a:t>
+              <a:t>📺 やっさん2  👁 11,506,317  👍 132,791  ⏱ 0:18  📅 2025-11-01</a:t>
             </a:r>
           </a:p>
         </p:txBody>
@@ -5553,7 +5553,7 @@
                 <a:latin typeface="Arial"/>
                 <a:hlinkClick r:id="rId3"/>
               </a:rPr>
-              <a:t>金に触れたら死ぬ #shorts #minecraft</a:t>
+              <a:t>感動のダブルスイカ‼️ #スイカゲーム #ゲーム実況 #サワヤンゲームズ</a:t>
             </a:r>
           </a:p>
         </p:txBody>
@@ -5612,7 +5612,7 @@
                 </a:solidFill>
                 <a:latin typeface="Arial"/>
               </a:rPr>
-              <a:t>📺 ヒロたまゲームズ  👁 80,510,114  👍 1,753,542  ⏱ 0:46  📅 2025-04-24</a:t>
+              <a:t>📺 にこみチャンネル  👁 20,449,472  👍 362,402  ⏱ 0:59  📅 2023-12-22</a:t>
             </a:r>
           </a:p>
         </p:txBody>
@@ -5647,7 +5647,7 @@
                 </a:solidFill>
                 <a:latin typeface="Arial"/>
               </a:rPr>
-              <a:t>https://www.youtube.com/watch?v=6uuRH_iMBT4</a:t>
+              <a:t>https://www.youtube.com/watch?v=mhCy0IgobIw</a:t>
             </a:r>
           </a:p>
         </p:txBody>
@@ -5787,7 +5787,7 @@
                 <a:latin typeface="Arial"/>
                 <a:hlinkClick r:id="rId6"/>
               </a:rPr>
-              <a:t>感動のダブルスイカ‼️ #スイカゲーム #ゲーム実況 #サワヤンゲームズ</a:t>
+              <a:t>見たことの無い落ち方をする配信者#葉 #ゲーム実況 #切り抜き #onlyup</a:t>
             </a:r>
           </a:p>
         </p:txBody>
@@ -5846,7 +5846,7 @@
                 </a:solidFill>
                 <a:latin typeface="Arial"/>
               </a:rPr>
-              <a:t>📺 にこみチャンネル  👁 20,449,413  👍 362,409  ⏱ 0:59  📅 2023-12-22</a:t>
+              <a:t>📺 葉ちゅべ  👁 19,985,543  👍 368,993  ⏱ 0:38  📅 2023-07-07</a:t>
             </a:r>
           </a:p>
         </p:txBody>
@@ -5881,7 +5881,7 @@
                 </a:solidFill>
                 <a:latin typeface="Arial"/>
               </a:rPr>
-              <a:t>https://www.youtube.com/watch?v=mhCy0IgobIw</a:t>
+              <a:t>https://www.youtube.com/watch?v=0cjKg-Z3xak</a:t>
             </a:r>
           </a:p>
         </p:txBody>
@@ -6021,7 +6021,7 @@
                 <a:latin typeface="Arial"/>
                 <a:hlinkClick r:id="rId9"/>
               </a:rPr>
-              <a:t>見たことの無い落ち方をする配信者#葉 #ゲーム実況 #切り抜き #onlyup</a:t>
+              <a:t>全部ひっかかる人【しょぼんのアクション3D】 #ゲーム実況</a:t>
             </a:r>
           </a:p>
         </p:txBody>
@@ -6080,7 +6080,7 @@
                 </a:solidFill>
                 <a:latin typeface="Arial"/>
               </a:rPr>
-              <a:t>📺 葉ちゅべ  👁 19,948,605  👍 368,579  ⏱ 0:38  📅 2023-07-07</a:t>
+              <a:t>📺 タン  👁 19,801,420  👍 389,684  ⏱ 1:00  📅 2023-09-28</a:t>
             </a:r>
           </a:p>
         </p:txBody>
@@ -6115,7 +6115,7 @@
                 </a:solidFill>
                 <a:latin typeface="Arial"/>
               </a:rPr>
-              <a:t>https://www.youtube.com/watch?v=0cjKg-Z3xak</a:t>
+              <a:t>https://www.youtube.com/watch?v=XGbduoPa_-0</a:t>
             </a:r>
           </a:p>
         </p:txBody>
@@ -6255,7 +6255,7 @@
                 <a:latin typeface="Arial"/>
                 <a:hlinkClick r:id="rId12"/>
               </a:rPr>
-              <a:t>全部ひっかかる人【しょぼんのアクション3D】 #ゲーム実況</a:t>
+              <a:t>ヒカキンのスーパーマリオ3Dワールド実況 パート1【Nintendo Switc…</a:t>
             </a:r>
           </a:p>
         </p:txBody>
@@ -6314,7 +6314,7 @@
                 </a:solidFill>
                 <a:latin typeface="Arial"/>
               </a:rPr>
-              <a:t>📺 タン  👁 19,801,354  👍 389,685  ⏱ 1:00  📅 2023-09-28</a:t>
+              <a:t>📺 HikakinGames  👁 12,505,722  👍 42,538  ⏱ 42:29  📅 2021-03-27</a:t>
             </a:r>
           </a:p>
         </p:txBody>
@@ -6349,7 +6349,7 @@
                 </a:solidFill>
                 <a:latin typeface="Arial"/>
               </a:rPr>
-              <a:t>https://www.youtube.com/watch?v=XGbduoPa_-0</a:t>
+              <a:t>https://www.youtube.com/watch?v=s7l76OBSrcg</a:t>
             </a:r>
           </a:p>
         </p:txBody>
@@ -6489,7 +6489,7 @@
                 <a:latin typeface="Arial"/>
                 <a:hlinkClick r:id="rId15"/>
               </a:rPr>
-              <a:t>崩れる時は一瞬</a:t>
+              <a:t>自然に隠れた末路がww #shorts  #prophunt #かくれんぼ #cod</a:t>
             </a:r>
           </a:p>
         </p:txBody>
@@ -6548,7 +6548,7 @@
                 </a:solidFill>
                 <a:latin typeface="Arial"/>
               </a:rPr>
-              <a:t>📺 ひろちんくん  👁 16,754,495  👍 292,477  ⏱ 0:58  📅 2023-06-11</a:t>
+              <a:t>📺 プン  👁 11,824,975  👍 157,640  ⏱ 1:00  📅 2024-10-30</a:t>
             </a:r>
           </a:p>
         </p:txBody>
@@ -6583,7 +6583,7 @@
                 </a:solidFill>
                 <a:latin typeface="Arial"/>
               </a:rPr>
-              <a:t>https://www.youtube.com/watch?v=CJ1A1aYvTe4</a:t>
+              <a:t>https://www.youtube.com/watch?v=d9MAnruE_-c</a:t>
             </a:r>
           </a:p>
         </p:txBody>
@@ -6819,7 +6819,7 @@
                 <a:latin typeface="Arial"/>
                 <a:hlinkClick r:id="rId3"/>
               </a:rPr>
-              <a:t>YOASOBI「勇者」 Official Music Video／TVアニメ『葬送の…</a:t>
+              <a:t>TVアニメ『呪術廻戦』第2期「懐玉・玉折」ノンクレジットOPムービー／OPテーマ：キ…</a:t>
             </a:r>
           </a:p>
         </p:txBody>
@@ -6878,7 +6878,7 @@
                 </a:solidFill>
                 <a:latin typeface="Arial"/>
               </a:rPr>
-              <a:t>📺 YOASOBI  👁 216,093,575  👍 1,211,948  ⏱ 3:24  📅 2023-09-29</a:t>
+              <a:t>📺 TOHO animation チャンネル  👁 143,005,751  👍 0  ⏱ 1:31  📅 2023-07-07</a:t>
             </a:r>
           </a:p>
         </p:txBody>
@@ -6913,7 +6913,7 @@
                 </a:solidFill>
                 <a:latin typeface="Arial"/>
               </a:rPr>
-              <a:t>https://www.youtube.com/watch?v=OIBODIPC_8Y</a:t>
+              <a:t>https://www.youtube.com/watch?v=gcgKUcJKxIs</a:t>
             </a:r>
           </a:p>
         </p:txBody>
@@ -7053,7 +7053,7 @@
                 <a:latin typeface="Arial"/>
                 <a:hlinkClick r:id="rId6"/>
               </a:rPr>
-              <a:t>TVアニメ『呪術廻戦』第2期「懐玉・玉折」ノンクレジットOPムービー／OPテーマ：キ…</a:t>
+              <a:t>Mrs. GREEN APPLE「ライラック」MV - TVアニメ『忘却バッテリー』…</a:t>
             </a:r>
           </a:p>
         </p:txBody>
@@ -7112,7 +7112,7 @@
                 </a:solidFill>
                 <a:latin typeface="Arial"/>
               </a:rPr>
-              <a:t>📺 TOHO animation チャンネル  👁 142,970,243  👍 0  ⏱ 1:31  📅 2023-07-07</a:t>
+              <a:t>📺 Mrs. GREEN APPLE  👁 53,630,774  👍 180,876  ⏱ 4:53  📅 2024-07-04</a:t>
             </a:r>
           </a:p>
         </p:txBody>
@@ -7147,7 +7147,7 @@
                 </a:solidFill>
                 <a:latin typeface="Arial"/>
               </a:rPr>
-              <a:t>https://www.youtube.com/watch?v=gcgKUcJKxIs</a:t>
+              <a:t>https://www.youtube.com/watch?v=-NFhRWhkp7I</a:t>
             </a:r>
           </a:p>
         </p:txBody>
@@ -7287,7 +7287,7 @@
                 <a:latin typeface="Arial"/>
                 <a:hlinkClick r:id="rId9"/>
               </a:rPr>
-              <a:t>Mrs. GREEN APPLE「ライラック」MV - TVアニメ『忘却バッテリー』…</a:t>
+              <a:t>ライオン</a:t>
             </a:r>
           </a:p>
         </p:txBody>
@@ -7346,7 +7346,7 @@
                 </a:solidFill>
                 <a:latin typeface="Arial"/>
               </a:rPr>
-              <a:t>📺 Mrs. GREEN APPLE  👁 53,608,906  👍 180,862  ⏱ 4:53  📅 2024-07-04</a:t>
+              <a:t>📺 May'n - Topic  👁 40,563,317  👍 138,247  ⏱ 5:04  📅 2020-10-01</a:t>
             </a:r>
           </a:p>
         </p:txBody>
@@ -7381,7 +7381,7 @@
                 </a:solidFill>
                 <a:latin typeface="Arial"/>
               </a:rPr>
-              <a:t>https://www.youtube.com/watch?v=-NFhRWhkp7I</a:t>
+              <a:t>https://www.youtube.com/watch?v=fGGTf044UPI</a:t>
             </a:r>
           </a:p>
         </p:txBody>
@@ -7580,7 +7580,7 @@
                 </a:solidFill>
                 <a:latin typeface="Arial"/>
               </a:rPr>
-              <a:t>📺 TOHO animation チャンネル  👁 36,520,353  👍 525,441  ⏱ 1:31  📅 2026-01-09</a:t>
+              <a:t>📺 TOHO animation チャンネル  👁 36,549,761  👍 525,566  ⏱ 1:31  📅 2026-01-09</a:t>
             </a:r>
           </a:p>
         </p:txBody>
@@ -7755,7 +7755,7 @@
                 <a:latin typeface="Arial"/>
                 <a:hlinkClick r:id="rId15"/>
               </a:rPr>
-              <a:t>合コンでライバルを潰す女【アニメ】 #shorts</a:t>
+              <a:t>TVアニメ「進撃の巨人」The Final Season Part 2ノンクレジット…</a:t>
             </a:r>
           </a:p>
         </p:txBody>
@@ -7814,7 +7814,7 @@
                 </a:solidFill>
                 <a:latin typeface="Arial"/>
               </a:rPr>
-              <a:t>📺 そろ谷のアニメっち  👁 23,088,646  👍 141,983  ⏱ 0:16  📅 2026-02-27</a:t>
+              <a:t>📺 ぽにきゃん-Anime PONY CANYON  👁 30,666,834  👍 583,776  ⏱ 1:31  📅 2022-01-10</a:t>
             </a:r>
           </a:p>
         </p:txBody>
@@ -7849,7 +7849,7 @@
                 </a:solidFill>
                 <a:latin typeface="Arial"/>
               </a:rPr>
-              <a:t>https://www.youtube.com/watch?v=nGQyPzkEy2s</a:t>
+              <a:t>https://www.youtube.com/watch?v=9lnh--ZOPyo</a:t>
             </a:r>
           </a:p>
         </p:txBody>
@@ -8144,7 +8144,7 @@
                 </a:solidFill>
                 <a:latin typeface="Arial"/>
               </a:rPr>
-              <a:t>📺 正直レビュー 🍰🍛  👁 6,811,315  👍 119,552  ⏱ 1:00  📅 2025-03-15</a:t>
+              <a:t>📺 正直レビュー 🍰🍛  👁 6,811,608  👍 119,555  ⏱ 1:00  📅 2025-03-15</a:t>
             </a:r>
           </a:p>
         </p:txBody>
@@ -8378,7 +8378,7 @@
                 </a:solidFill>
                 <a:latin typeface="Arial"/>
               </a:rPr>
-              <a:t>📺 KABUKU. / 市川團十郎。  👁 3,582,961  👍 45,855  ⏱ 17:48  📅 2025-07-12</a:t>
+              <a:t>📺 KABUKU. / 市川團十郎。  👁 3,587,226  👍 45,889  ⏱ 17:48  📅 2025-07-12</a:t>
             </a:r>
           </a:p>
         </p:txBody>
@@ -8612,7 +8612,7 @@
                 </a:solidFill>
                 <a:latin typeface="Arial"/>
               </a:rPr>
-              <a:t>📺 東海オンエア  👁 3,391,229  👍 30,068  ⏱ 34:45  📅 2024-09-26</a:t>
+              <a:t>📺 東海オンエア  👁 3,392,263  👍 30,074  ⏱ 34:45  📅 2024-09-26</a:t>
             </a:r>
           </a:p>
         </p:txBody>
@@ -8846,7 +8846,7 @@
                 </a:solidFill>
                 <a:latin typeface="Arial"/>
               </a:rPr>
-              <a:t>📺 ホッカイロレン  👁 3,324,194  👍 43,708  ⏱ 12:56  📅 2023-12-19</a:t>
+              <a:t>📺 ホッカイロレン  👁 3,325,054  👍 43,716  ⏱ 12:56  📅 2023-12-19</a:t>
             </a:r>
           </a:p>
         </p:txBody>
@@ -9080,7 +9080,7 @@
                 </a:solidFill>
                 <a:latin typeface="Arial"/>
               </a:rPr>
-              <a:t>📺 フィルムチェーン  👁 3,249,083  👍 55,545  ⏱ 0:56  📅 2026-05-18</a:t>
+              <a:t>📺 フィルムチェーン  👁 3,296,792  👍 56,309  ⏱ 0:56  📅 2026-05-18</a:t>
             </a:r>
           </a:p>
         </p:txBody>
@@ -9294,7 +9294,7 @@
                 </a:solidFill>
                 <a:latin typeface="Arial"/>
               </a:rPr>
-              <a:t>https://www.youtube.com/watch?v=oWRCXGvcU9s</a:t>
+              <a:t>https://www.youtube.com/watch?v=t9I1nEjwS64</a:t>
             </a:r>
           </a:p>
         </p:txBody>
@@ -9330,7 +9330,7 @@
                 <a:latin typeface="Arial"/>
                 <a:hlinkClick r:id="rId4"/>
               </a:rPr>
-              <a:t>≠ME（ノットイコールミー）/ 12th 両A面シングル『愛くださいませ』【MV full】/  Ai Kudasai Mase (Please give me your love)</a:t>
+              <a:t>【検証】スプラ上位勢と２時間オープンマッチに潜ったら余裕で世界１位取れる説</a:t>
             </a:r>
           </a:p>
         </p:txBody>
@@ -9365,7 +9365,7 @@
                 </a:solidFill>
                 <a:latin typeface="Arial"/>
               </a:rPr>
-              <a:t>📺  NOT EQUAL ME ノットイコールミー 公式チャンネル</a:t>
+              <a:t>📺  GON</a:t>
             </a:r>
           </a:p>
         </p:txBody>
@@ -9400,7 +9400,7 @@
                 </a:solidFill>
                 <a:latin typeface="Arial"/>
               </a:rPr>
-              <a:t>👁 521,250  👍 28,049  💬 2,940  📈+144.7%</a:t>
+              <a:t>👁 142,138  👍 2,802  💬 250  📈+165.3%</a:t>
             </a:r>
           </a:p>
         </p:txBody>
@@ -9435,7 +9435,7 @@
                 </a:solidFill>
                 <a:latin typeface="Arial"/>
               </a:rPr>
-              <a:t>⏱ 4:09  ·  📅 公開32時間前</a:t>
+              <a:t>⏱ 1:03:52  ·  📅 公開2時間前</a:t>
             </a:r>
           </a:p>
         </p:txBody>
@@ -9470,7 +9470,7 @@
                 </a:solidFill>
                 <a:latin typeface="Arial"/>
               </a:rPr>
-              <a:t>💡 公開1日で急上昇　50万再生の注目コンテンツ　前日比+144.7%と急拡散中</a:t>
+              <a:t>💡 公開2時間で急上昇入り！　10万再生突破の話題作　前日比+165.3%と急拡散中</a:t>
             </a:r>
           </a:p>
         </p:txBody>
@@ -9673,7 +9673,7 @@
                 </a:solidFill>
                 <a:latin typeface="Arial"/>
               </a:rPr>
-              <a:t>https://www.youtube.com/watch?v=wX7AnZimlMY</a:t>
+              <a:t>https://www.youtube.com/watch?v=40AbunWFAUU</a:t>
             </a:r>
           </a:p>
         </p:txBody>
@@ -9709,7 +9709,7 @@
                 <a:latin typeface="Arial"/>
                 <a:hlinkClick r:id="rId4"/>
               </a:rPr>
-              <a:t>全てが10分の1の世界でエンドラ討伐！【マイクラ】</a:t>
+              <a:t>STARGLOW / USOTSUKI [フジテレビ系「STAR」]</a:t>
             </a:r>
           </a:p>
         </p:txBody>
@@ -9744,7 +9744,7 @@
                 </a:solidFill>
                 <a:latin typeface="Arial"/>
               </a:rPr>
-              <a:t>📺  ドズル社</a:t>
+              <a:t>📺  STARGLOW Official</a:t>
             </a:r>
           </a:p>
         </p:txBody>
@@ -9779,7 +9779,7 @@
                 </a:solidFill>
                 <a:latin typeface="Arial"/>
               </a:rPr>
-              <a:t>👁 308,520  👍 9,048  💬 200</a:t>
+              <a:t>👁 73,861  👍 7,344  💬 246</a:t>
             </a:r>
           </a:p>
         </p:txBody>
@@ -9814,7 +9814,7 @@
                 </a:solidFill>
                 <a:latin typeface="Arial"/>
               </a:rPr>
-              <a:t>⏱ 32:49  ·  📅 公開12時間前</a:t>
+              <a:t>⏱ 2:54  ·  📅 公開1時間前</a:t>
             </a:r>
           </a:p>
         </p:txBody>
@@ -9849,7 +9849,7 @@
                 </a:solidFill>
                 <a:latin typeface="Arial"/>
               </a:rPr>
-              <a:t>💡 公開12時間で急上昇入り！　10万再生突破の話題作　いいね率2.9%と好評価</a:t>
+              <a:t>💡 公開1時間で急上昇入り！　急上昇中の新興コンテンツ　いいね率9.9%と視聴者の支持が非常に高い</a:t>
             </a:r>
           </a:p>
         </p:txBody>
@@ -10052,7 +10052,7 @@
                 </a:solidFill>
                 <a:latin typeface="Arial"/>
               </a:rPr>
-              <a:t>https://www.youtube.com/watch?v=wWCC_n0szNc</a:t>
+              <a:t>https://www.youtube.com/watch?v=xAupkimVzOo</a:t>
             </a:r>
           </a:p>
         </p:txBody>
@@ -10088,7 +10088,7 @@
                 <a:latin typeface="Arial"/>
                 <a:hlinkClick r:id="rId4"/>
               </a:rPr>
-              <a:t>Little Glee Monster - Jupiter / THE FIRST TAKE</a:t>
+              <a:t>【マインクラフト】モンスターにお金を賭けて1番儲けた人の勝ちです【日常組】</a:t>
             </a:r>
           </a:p>
         </p:txBody>
@@ -10123,7 +10123,7 @@
                 </a:solidFill>
                 <a:latin typeface="Arial"/>
               </a:rPr>
-              <a:t>📺  THE FIRST TAKE</a:t>
+              <a:t>📺  日常組</a:t>
             </a:r>
           </a:p>
         </p:txBody>
@@ -10158,7 +10158,7 @@
                 </a:solidFill>
                 <a:latin typeface="Arial"/>
               </a:rPr>
-              <a:t>👁 105,438  👍 5,831  💬 288</a:t>
+              <a:t>👁 631,002  👍 21,203  💬 695  📈+20.1%</a:t>
             </a:r>
           </a:p>
         </p:txBody>
@@ -10193,7 +10193,7 @@
                 </a:solidFill>
                 <a:latin typeface="Arial"/>
               </a:rPr>
-              <a:t>⏱ 6:03  ·  📅 公開8時間前</a:t>
+              <a:t>⏱ 1:33:24  ·  📅 公開21時間前</a:t>
             </a:r>
           </a:p>
         </p:txBody>
@@ -10228,7 +10228,7 @@
                 </a:solidFill>
                 <a:latin typeface="Arial"/>
               </a:rPr>
-              <a:t>💡 公開8時間で急上昇入り！　10万再生突破の話題作　いいね率5.5%と視聴者の支持が非常に高い</a:t>
+              <a:t>💡 公開21時間で急上昇入り！　50万再生の注目コンテンツ　前日比+20.1%で着実に成長</a:t>
             </a:r>
           </a:p>
         </p:txBody>
@@ -10431,7 +10431,7 @@
                 </a:solidFill>
                 <a:latin typeface="Arial"/>
               </a:rPr>
-              <a:t>https://www.youtube.com/watch?v=wMDo5iZ0mdM</a:t>
+              <a:t>https://www.youtube.com/watch?v=SLe3j6oz12k</a:t>
             </a:r>
           </a:p>
         </p:txBody>
@@ -10467,7 +10467,7 @@
                 <a:latin typeface="Arial"/>
                 <a:hlinkClick r:id="rId4"/>
               </a:rPr>
-              <a:t>100日間でブレインロッド動物園を作る【 マイクラ / マインクラフト 】</a:t>
+              <a:t>WEST. - LIVE Blu-ray &amp; DVD「WEST. SPECIAL LIVE 『WESTA!』 2025-2026」Digest</a:t>
             </a:r>
           </a:p>
         </p:txBody>
@@ -10502,7 +10502,7 @@
                 </a:solidFill>
                 <a:latin typeface="Arial"/>
               </a:rPr>
-              <a:t>📺  ウォーターチャレンジ</a:t>
+              <a:t>📺  WEST.</a:t>
             </a:r>
           </a:p>
         </p:txBody>
@@ -10537,7 +10537,7 @@
                 </a:solidFill>
                 <a:latin typeface="Arial"/>
               </a:rPr>
-              <a:t>👁 273,736  👍 2,614  💬 73</a:t>
+              <a:t>👁 48,652  👍 10,547  💬 927</a:t>
             </a:r>
           </a:p>
         </p:txBody>
@@ -10572,7 +10572,7 @@
                 </a:solidFill>
                 <a:latin typeface="Arial"/>
               </a:rPr>
-              <a:t>⏱ 30:09  ·  📅 公開14時間前</a:t>
+              <a:t>⏱ 3:34  ·  📅 公開-3時間前</a:t>
             </a:r>
           </a:p>
         </p:txBody>
@@ -10607,7 +10607,7 @@
                 </a:solidFill>
                 <a:latin typeface="Arial"/>
               </a:rPr>
-              <a:t>💡 公開14時間で急上昇入り！　10万再生突破の話題作</a:t>
+              <a:t>💡 公開-3時間で急上昇入り！　急上昇中の新興コンテンツ　いいね率21.7%と視聴者の支持が非常に高い</a:t>
             </a:r>
           </a:p>
         </p:txBody>
@@ -10810,7 +10810,7 @@
                 </a:solidFill>
                 <a:latin typeface="Arial"/>
               </a:rPr>
-              <a:t>https://www.youtube.com/watch?v=MEoxtFRfPoc</a:t>
+              <a:t>https://www.youtube.com/watch?v=vSKMyQH7msk</a:t>
             </a:r>
           </a:p>
         </p:txBody>
@@ -10846,7 +10846,7 @@
                 <a:latin typeface="Arial"/>
                 <a:hlinkClick r:id="rId4"/>
               </a:rPr>
-              <a:t>BTS (방탄소년단) 'Come Over' Lyric Video</a:t>
+              <a:t>ドズル社 VS 超巨大ビンゴ！！【マイクラ】</a:t>
             </a:r>
           </a:p>
         </p:txBody>
@@ -10881,7 +10881,7 @@
                 </a:solidFill>
                 <a:latin typeface="Arial"/>
               </a:rPr>
-              <a:t>📺  BANGTANTV</a:t>
+              <a:t>📺  ドズル社</a:t>
             </a:r>
           </a:p>
         </p:txBody>
@@ -10916,7 +10916,7 @@
                 </a:solidFill>
                 <a:latin typeface="Arial"/>
               </a:rPr>
-              <a:t>👁 2,978,850  👍 767,405  💬 57,575  📈+280.8%</a:t>
+              <a:t>👁 140,090  👍 6,995  💬 342</a:t>
             </a:r>
           </a:p>
         </p:txBody>
@@ -10951,7 +10951,7 @@
                 </a:solidFill>
                 <a:latin typeface="Arial"/>
               </a:rPr>
-              <a:t>⏱ 3:00  ·  📅 公開17時間前</a:t>
+              <a:t>⏱ 53:59  ·  📅 公開-4時間前</a:t>
             </a:r>
           </a:p>
         </p:txBody>
@@ -10986,7 +10986,7 @@
                 </a:solidFill>
                 <a:latin typeface="Arial"/>
               </a:rPr>
-              <a:t>💡 公開17時間で急上昇入り！　100万再生超の大ヒット　前日比+280.8%の爆発的な伸び</a:t>
+              <a:t>💡 公開-4時間で急上昇入り！　10万再生突破の話題作　いいね率5.0%と好評価</a:t>
             </a:r>
           </a:p>
         </p:txBody>
@@ -11189,7 +11189,7 @@
                 </a:solidFill>
                 <a:latin typeface="Arial"/>
               </a:rPr>
-              <a:t>https://www.youtube.com/watch?v=N9mySY1GBVE</a:t>
+              <a:t>https://www.youtube.com/watch?v=K_cOrwcV-54</a:t>
             </a:r>
           </a:p>
         </p:txBody>
@@ -11225,7 +11225,7 @@
                 <a:latin typeface="Arial"/>
                 <a:hlinkClick r:id="rId4"/>
               </a:rPr>
-              <a:t>自由な住民たちの生活を見守る神ゲー『 トモダチコレクション わくわく生活 』～けーきよちん～</a:t>
+              <a:t>【自己紹介曲】ぷろふぃ〜る / のんふぃく！【Dance Practice】</a:t>
             </a:r>
           </a:p>
         </p:txBody>
@@ -11260,7 +11260,7 @@
                 </a:solidFill>
                 <a:latin typeface="Arial"/>
               </a:rPr>
-              <a:t>📺  キヨ。</a:t>
+              <a:t>📺  のんふぃく！【Non¬Fiction】</a:t>
             </a:r>
           </a:p>
         </p:txBody>
@@ -11295,7 +11295,7 @@
                 </a:solidFill>
                 <a:latin typeface="Arial"/>
               </a:rPr>
-              <a:t>👁 1,338,872  👍 43,968  💬 3,134  📈+50.4%</a:t>
+              <a:t>👁 166,639  👍 9,226  💬 417  📈+18.3%</a:t>
             </a:r>
           </a:p>
         </p:txBody>
@@ -11330,7 +11330,7 @@
                 </a:solidFill>
                 <a:latin typeface="Arial"/>
               </a:rPr>
-              <a:t>⏱ 1:11:55  ·  📅 公開36時間前</a:t>
+              <a:t>⏱ 3:55  ·  📅 公開17時間前</a:t>
             </a:r>
           </a:p>
         </p:txBody>
@@ -11365,7 +11365,7 @@
                 </a:solidFill>
                 <a:latin typeface="Arial"/>
               </a:rPr>
-              <a:t>💡 公開1日で急上昇　100万再生超の大ヒット　前日比+50.4%と急拡散中</a:t>
+              <a:t>💡 公開17時間で急上昇入り！　10万再生突破の話題作　前日比+18.3%で着実に成長</a:t>
             </a:r>
           </a:p>
         </p:txBody>
@@ -11568,7 +11568,7 @@
                 </a:solidFill>
                 <a:latin typeface="Arial"/>
               </a:rPr>
-              <a:t>https://www.youtube.com/watch?v=ps2E3T63UWw</a:t>
+              <a:t>https://www.youtube.com/watch?v=W8BJE4McQAw</a:t>
             </a:r>
           </a:p>
         </p:txBody>
@@ -11604,7 +11604,7 @@
                 <a:latin typeface="Arial"/>
                 <a:hlinkClick r:id="rId4"/>
               </a:rPr>
-              <a:t>是非に及ばず</a:t>
+              <a:t>【#にじシャドバ杯 本番】  徹夜バース 【 くるぜBBB 】</a:t>
             </a:r>
           </a:p>
         </p:txBody>
@@ -11639,7 +11639,7 @@
                 </a:solidFill>
                 <a:latin typeface="Arial"/>
               </a:rPr>
-              <a:t>📺  Nogizaka46 - Topic</a:t>
+              <a:t>📺  Kuzuha Channel</a:t>
             </a:r>
           </a:p>
         </p:txBody>
@@ -11674,7 +11674,7 @@
                 </a:solidFill>
                 <a:latin typeface="Arial"/>
               </a:rPr>
-              <a:t>👁 98,331  👍 2,824  💬 1,741</a:t>
+              <a:t>👁 278,219  👍 4,896  💬 14</a:t>
             </a:r>
           </a:p>
         </p:txBody>
@@ -11709,7 +11709,7 @@
                 </a:solidFill>
                 <a:latin typeface="Arial"/>
               </a:rPr>
-              <a:t>⏱ 3:57  ·  📅 公開6時間前</a:t>
+              <a:t>⏱ 2:55:57  ·  📅 公開-6時間前</a:t>
             </a:r>
           </a:p>
         </p:txBody>
@@ -11744,7 +11744,7 @@
                 </a:solidFill>
                 <a:latin typeface="Arial"/>
               </a:rPr>
-              <a:t>💡 公開6時間で急上昇入り！　急上昇中の新興コンテンツ　いいね率2.9%と好評価</a:t>
+              <a:t>💡 公開-6時間で急上昇入り！　10万再生突破の話題作</a:t>
             </a:r>
           </a:p>
         </p:txBody>
@@ -11947,7 +11947,7 @@
                 </a:solidFill>
                 <a:latin typeface="Arial"/>
               </a:rPr>
-              <a:t>https://www.youtube.com/watch?v=xAupkimVzOo</a:t>
+              <a:t>https://www.youtube.com/watch?v=ps2E3T63UWw</a:t>
             </a:r>
           </a:p>
         </p:txBody>
@@ -11983,7 +11983,7 @@
                 <a:latin typeface="Arial"/>
                 <a:hlinkClick r:id="rId4"/>
               </a:rPr>
-              <a:t>【マインクラフト】モンスターにお金を賭けて1番儲けた人の勝ちです【日常組】</a:t>
+              <a:t>是非に及ばず</a:t>
             </a:r>
           </a:p>
         </p:txBody>
@@ -12018,7 +12018,7 @@
                 </a:solidFill>
                 <a:latin typeface="Arial"/>
               </a:rPr>
-              <a:t>📺  日常組</a:t>
+              <a:t>📺  Nogizaka46 - Topic</a:t>
             </a:r>
           </a:p>
         </p:txBody>
@@ -12053,7 +12053,7 @@
                 </a:solidFill>
                 <a:latin typeface="Arial"/>
               </a:rPr>
-              <a:t>👁 525,544  👍 19,119  💬 657</a:t>
+              <a:t>👁 138,537  👍 3,339  💬 2,355  📈+40.9%</a:t>
             </a:r>
           </a:p>
         </p:txBody>
@@ -12088,7 +12088,7 @@
                 </a:solidFill>
                 <a:latin typeface="Arial"/>
               </a:rPr>
-              <a:t>⏱ 1:33:24  ·  📅 公開13時間前</a:t>
+              <a:t>⏱ 3:57  ·  📅 公開14時間前</a:t>
             </a:r>
           </a:p>
         </p:txBody>
@@ -12123,7 +12123,7 @@
                 </a:solidFill>
                 <a:latin typeface="Arial"/>
               </a:rPr>
-              <a:t>💡 公開13時間で急上昇入り！　50万再生の注目コンテンツ　いいね率3.6%と好評価</a:t>
+              <a:t>💡 公開14時間で急上昇入り！　10万再生突破の話題作　前日比+40.9%で着実に成長</a:t>
             </a:r>
           </a:p>
         </p:txBody>

--- a/youtube_ranking_20260613.pptx
+++ b/youtube_ranking_20260613.pptx
@@ -10951,7 +10951,7 @@
                 </a:solidFill>
                 <a:latin typeface="Arial"/>
               </a:rPr>
-              <a:t>⏱ 53:59  ·  📅 公開-4時間前</a:t>
+              <a:t>⏱ 53:59  ·  📅 公開-3時間前</a:t>
             </a:r>
           </a:p>
         </p:txBody>
@@ -10986,7 +10986,7 @@
                 </a:solidFill>
                 <a:latin typeface="Arial"/>
               </a:rPr>
-              <a:t>💡 公開-4時間で急上昇入り！　10万再生突破の話題作　いいね率5.0%と好評価</a:t>
+              <a:t>💡 公開-3時間で急上昇入り！　10万再生突破の話題作　いいね率5.0%と好評価</a:t>
             </a:r>
           </a:p>
         </p:txBody>
